--- a/prezentacie/p06w.pptx
+++ b/prezentacie/p06w.pptx
@@ -249,7 +249,7 @@
           <a:p>
             <a:fld id="{10052495-8BC8-4CFB-94B1-B0429F101A0D}" type="datetimeFigureOut">
               <a:rPr lang="sk-SK" smtClean="0"/>
-              <a:t>4. 10. 2025</a:t>
+              <a:t>17. 10. 2026</a:t>
             </a:fld>
             <a:endParaRPr lang="sk-SK"/>
           </a:p>
@@ -419,7 +419,7 @@
           <a:p>
             <a:fld id="{10052495-8BC8-4CFB-94B1-B0429F101A0D}" type="datetimeFigureOut">
               <a:rPr lang="sk-SK" smtClean="0"/>
-              <a:t>4. 10. 2025</a:t>
+              <a:t>17. 10. 2026</a:t>
             </a:fld>
             <a:endParaRPr lang="sk-SK"/>
           </a:p>
@@ -599,7 +599,7 @@
           <a:p>
             <a:fld id="{10052495-8BC8-4CFB-94B1-B0429F101A0D}" type="datetimeFigureOut">
               <a:rPr lang="sk-SK" smtClean="0"/>
-              <a:t>4. 10. 2025</a:t>
+              <a:t>17. 10. 2026</a:t>
             </a:fld>
             <a:endParaRPr lang="sk-SK"/>
           </a:p>
@@ -769,7 +769,7 @@
           <a:p>
             <a:fld id="{10052495-8BC8-4CFB-94B1-B0429F101A0D}" type="datetimeFigureOut">
               <a:rPr lang="sk-SK" smtClean="0"/>
-              <a:t>4. 10. 2025</a:t>
+              <a:t>17. 10. 2026</a:t>
             </a:fld>
             <a:endParaRPr lang="sk-SK"/>
           </a:p>
@@ -1015,7 +1015,7 @@
           <a:p>
             <a:fld id="{10052495-8BC8-4CFB-94B1-B0429F101A0D}" type="datetimeFigureOut">
               <a:rPr lang="sk-SK" smtClean="0"/>
-              <a:t>4. 10. 2025</a:t>
+              <a:t>17. 10. 2026</a:t>
             </a:fld>
             <a:endParaRPr lang="sk-SK"/>
           </a:p>
@@ -1247,7 +1247,7 @@
           <a:p>
             <a:fld id="{10052495-8BC8-4CFB-94B1-B0429F101A0D}" type="datetimeFigureOut">
               <a:rPr lang="sk-SK" smtClean="0"/>
-              <a:t>4. 10. 2025</a:t>
+              <a:t>17. 10. 2026</a:t>
             </a:fld>
             <a:endParaRPr lang="sk-SK"/>
           </a:p>
@@ -1614,7 +1614,7 @@
           <a:p>
             <a:fld id="{10052495-8BC8-4CFB-94B1-B0429F101A0D}" type="datetimeFigureOut">
               <a:rPr lang="sk-SK" smtClean="0"/>
-              <a:t>4. 10. 2025</a:t>
+              <a:t>17. 10. 2026</a:t>
             </a:fld>
             <a:endParaRPr lang="sk-SK"/>
           </a:p>
@@ -1732,7 +1732,7 @@
           <a:p>
             <a:fld id="{10052495-8BC8-4CFB-94B1-B0429F101A0D}" type="datetimeFigureOut">
               <a:rPr lang="sk-SK" smtClean="0"/>
-              <a:t>4. 10. 2025</a:t>
+              <a:t>17. 10. 2026</a:t>
             </a:fld>
             <a:endParaRPr lang="sk-SK"/>
           </a:p>
@@ -1827,7 +1827,7 @@
           <a:p>
             <a:fld id="{10052495-8BC8-4CFB-94B1-B0429F101A0D}" type="datetimeFigureOut">
               <a:rPr lang="sk-SK" smtClean="0"/>
-              <a:t>4. 10. 2025</a:t>
+              <a:t>17. 10. 2026</a:t>
             </a:fld>
             <a:endParaRPr lang="sk-SK"/>
           </a:p>
@@ -2104,7 +2104,7 @@
           <a:p>
             <a:fld id="{10052495-8BC8-4CFB-94B1-B0429F101A0D}" type="datetimeFigureOut">
               <a:rPr lang="sk-SK" smtClean="0"/>
-              <a:t>4. 10. 2025</a:t>
+              <a:t>17. 10. 2026</a:t>
             </a:fld>
             <a:endParaRPr lang="sk-SK"/>
           </a:p>
@@ -2361,7 +2361,7 @@
           <a:p>
             <a:fld id="{10052495-8BC8-4CFB-94B1-B0429F101A0D}" type="datetimeFigureOut">
               <a:rPr lang="sk-SK" smtClean="0"/>
-              <a:t>4. 10. 2025</a:t>
+              <a:t>17. 10. 2026</a:t>
             </a:fld>
             <a:endParaRPr lang="sk-SK"/>
           </a:p>
@@ -2574,7 +2574,7 @@
           <a:p>
             <a:fld id="{10052495-8BC8-4CFB-94B1-B0429F101A0D}" type="datetimeFigureOut">
               <a:rPr lang="sk-SK" smtClean="0"/>
-              <a:t>4. 10. 2025</a:t>
+              <a:t>17. 10. 2026</a:t>
             </a:fld>
             <a:endParaRPr lang="sk-SK"/>
           </a:p>
@@ -3516,7 +3516,15 @@
             </a:br>
             <a:r>
               <a:rPr lang="sk-SK" b="1" dirty="0"/>
-              <a:t>Ing. Jozef Wagner PhD.</a:t>
+              <a:t>Ing. Jozef Wagner</a:t>
+            </a:r>
+            <a:r>
+              <a:rPr lang="en-US" b="1" dirty="0"/>
+              <a:t>,</a:t>
+            </a:r>
+            <a:r>
+              <a:rPr lang="sk-SK" b="1" dirty="0"/>
+              <a:t> PhD.</a:t>
             </a:r>
           </a:p>
           <a:p>
@@ -4220,11 +4228,25 @@
               <a:buNone/>
             </a:pPr>
             <a:r>
-              <a:rPr lang="sk-SK" dirty="0" err="1"/>
+              <a:rPr lang="sk-SK" dirty="0" err="1">
+                <a:solidFill>
+                  <a:srgbClr val="FF0000"/>
+                </a:solidFill>
+                <a:highlight>
+                  <a:srgbClr val="00FFFF"/>
+                </a:highlight>
+              </a:rPr>
               <a:t>Manifesto</a:t>
             </a:r>
             <a:r>
-              <a:rPr lang="sk-SK" dirty="0"/>
+              <a:rPr lang="sk-SK" dirty="0">
+                <a:solidFill>
+                  <a:srgbClr val="FF0000"/>
+                </a:solidFill>
+                <a:highlight>
+                  <a:srgbClr val="00FFFF"/>
+                </a:highlight>
+              </a:rPr>
               <a:t> agilného vývoja softvéru</a:t>
             </a:r>
           </a:p>
@@ -4235,8 +4257,23 @@
               </a:spcBef>
             </a:pPr>
             <a:r>
-              <a:rPr lang="sk-SK" sz="2800" b="1" dirty="0"/>
-              <a:t>Ľudia a komunikácia </a:t>
+              <a:rPr lang="sk-SK" sz="2800" b="1" dirty="0">
+                <a:solidFill>
+                  <a:srgbClr val="FF0000"/>
+                </a:solidFill>
+                <a:highlight>
+                  <a:srgbClr val="00FFFF"/>
+                </a:highlight>
+              </a:rPr>
+              <a:t>Ľudia a komunikácia</a:t>
+            </a:r>
+            <a:r>
+              <a:rPr lang="sk-SK" sz="2800" b="1" dirty="0">
+                <a:solidFill>
+                  <a:srgbClr val="FF0000"/>
+                </a:solidFill>
+              </a:rPr>
+              <a:t> </a:t>
             </a:r>
             <a:r>
               <a:rPr lang="sk-SK" sz="2800" dirty="0"/>
@@ -4250,8 +4287,19 @@
               </a:spcBef>
             </a:pPr>
             <a:r>
+              <a:rPr lang="sk-SK" sz="2800" b="1" dirty="0">
+                <a:solidFill>
+                  <a:srgbClr val="FF0000"/>
+                </a:solidFill>
+                <a:highlight>
+                  <a:srgbClr val="00FFFF"/>
+                </a:highlight>
+              </a:rPr>
+              <a:t>Funkčný softvér</a:t>
+            </a:r>
+            <a:r>
               <a:rPr lang="sk-SK" sz="2800" b="1" dirty="0"/>
-              <a:t>Funkčný softvér </a:t>
+              <a:t> </a:t>
             </a:r>
             <a:r>
               <a:rPr lang="sk-SK" sz="2800" dirty="0"/>
@@ -4265,8 +4313,19 @@
               </a:spcBef>
             </a:pPr>
             <a:r>
+              <a:rPr lang="sk-SK" sz="2800" b="1" dirty="0">
+                <a:solidFill>
+                  <a:srgbClr val="FF0000"/>
+                </a:solidFill>
+                <a:highlight>
+                  <a:srgbClr val="00FFFF"/>
+                </a:highlight>
+              </a:rPr>
+              <a:t>Spolupráca so zákazníkom</a:t>
+            </a:r>
+            <a:r>
               <a:rPr lang="sk-SK" sz="2800" b="1" dirty="0"/>
-              <a:t>Spolupráca so zákazníkom </a:t>
+              <a:t> </a:t>
             </a:r>
             <a:r>
               <a:rPr lang="sk-SK" sz="2800" dirty="0"/>
@@ -4281,7 +4340,22 @@
             </a:pPr>
             <a:r>
               <a:rPr lang="sk-SK" sz="2800" b="1" dirty="0"/>
-              <a:t>Radšej reagovať na zmenu </a:t>
+              <a:t>Radšej </a:t>
+            </a:r>
+            <a:r>
+              <a:rPr lang="sk-SK" sz="2800" b="1" dirty="0">
+                <a:solidFill>
+                  <a:srgbClr val="FF0000"/>
+                </a:solidFill>
+                <a:highlight>
+                  <a:srgbClr val="00FFFF"/>
+                </a:highlight>
+              </a:rPr>
+              <a:t>reagovať na zmenu</a:t>
+            </a:r>
+            <a:r>
+              <a:rPr lang="sk-SK" sz="2800" b="1" dirty="0"/>
+              <a:t> </a:t>
             </a:r>
             <a:r>
               <a:rPr lang="sk-SK" sz="2800" dirty="0"/>
@@ -4403,7 +4477,14 @@
               <a:buNone/>
             </a:pPr>
             <a:r>
-              <a:rPr lang="sk-SK" dirty="0"/>
+              <a:rPr lang="sk-SK" dirty="0">
+                <a:solidFill>
+                  <a:srgbClr val="FF0000"/>
+                </a:solidFill>
+                <a:highlight>
+                  <a:srgbClr val="00FFFF"/>
+                </a:highlight>
+              </a:rPr>
               <a:t>Riziká</a:t>
             </a:r>
           </a:p>
@@ -4414,7 +4495,14 @@
               </a:spcBef>
             </a:pPr>
             <a:r>
-              <a:rPr lang="sk-SK" sz="2800" dirty="0"/>
+              <a:rPr lang="sk-SK" sz="2800" dirty="0">
+                <a:solidFill>
+                  <a:srgbClr val="FF0000"/>
+                </a:solidFill>
+                <a:highlight>
+                  <a:srgbClr val="00FFFF"/>
+                </a:highlight>
+              </a:rPr>
               <a:t>Nedostatok dokumentácie a plánovania</a:t>
             </a:r>
           </a:p>
@@ -4425,15 +4513,36 @@
               </a:spcBef>
             </a:pPr>
             <a:r>
-              <a:rPr lang="sk-SK" sz="2800" dirty="0" err="1"/>
+              <a:rPr lang="sk-SK" sz="2800" dirty="0" err="1">
+                <a:solidFill>
+                  <a:srgbClr val="FF0000"/>
+                </a:solidFill>
+                <a:highlight>
+                  <a:srgbClr val="00FFFF"/>
+                </a:highlight>
+              </a:rPr>
               <a:t>Scope</a:t>
             </a:r>
             <a:r>
-              <a:rPr lang="sk-SK" sz="2800" dirty="0"/>
+              <a:rPr lang="sk-SK" sz="2800" dirty="0">
+                <a:solidFill>
+                  <a:srgbClr val="FF0000"/>
+                </a:solidFill>
+                <a:highlight>
+                  <a:srgbClr val="00FFFF"/>
+                </a:highlight>
+              </a:rPr>
               <a:t> </a:t>
             </a:r>
             <a:r>
-              <a:rPr lang="sk-SK" sz="2800" dirty="0" err="1"/>
+              <a:rPr lang="sk-SK" sz="2800" dirty="0" err="1">
+                <a:solidFill>
+                  <a:srgbClr val="FF0000"/>
+                </a:solidFill>
+                <a:highlight>
+                  <a:srgbClr val="00FFFF"/>
+                </a:highlight>
+              </a:rPr>
               <a:t>creep</a:t>
             </a:r>
             <a:r>
@@ -4448,8 +4557,19 @@
               </a:spcBef>
             </a:pPr>
             <a:r>
+              <a:rPr lang="sk-SK" sz="2800" dirty="0">
+                <a:solidFill>
+                  <a:srgbClr val="FF0000"/>
+                </a:solidFill>
+                <a:highlight>
+                  <a:srgbClr val="00FFFF"/>
+                </a:highlight>
+              </a:rPr>
+              <a:t>Prílišná byrokracia</a:t>
+            </a:r>
+            <a:r>
               <a:rPr lang="sk-SK" sz="2800" dirty="0"/>
-              <a:t>Prílišná byrokracia, ceremónia a rituály</a:t>
+              <a:t>, ceremónia a rituály</a:t>
             </a:r>
             <a:endParaRPr lang="sk-SK" sz="2800" dirty="0">
               <a:highlight>
@@ -4482,7 +4602,14 @@
           <a:lstStyle/>
           <a:p>
             <a:r>
-              <a:rPr lang="sk-SK" dirty="0"/>
+              <a:rPr lang="sk-SK" dirty="0">
+                <a:solidFill>
+                  <a:srgbClr val="FF0000"/>
+                </a:solidFill>
+                <a:highlight>
+                  <a:srgbClr val="00FFFF"/>
+                </a:highlight>
+              </a:rPr>
               <a:t>Agilný vývoj</a:t>
             </a:r>
           </a:p>
@@ -4567,7 +4694,14 @@
               <a:buNone/>
             </a:pPr>
             <a:r>
-              <a:rPr lang="sk-SK" dirty="0" err="1"/>
+              <a:rPr lang="sk-SK" dirty="0" err="1">
+                <a:solidFill>
+                  <a:srgbClr val="FF0000"/>
+                </a:solidFill>
+                <a:highlight>
+                  <a:srgbClr val="00FFFF"/>
+                </a:highlight>
+              </a:rPr>
               <a:t>Scrum</a:t>
             </a:r>
             <a:r>
@@ -4582,7 +4716,14 @@
               </a:spcBef>
             </a:pPr>
             <a:r>
-              <a:rPr lang="sk-SK" b="1" dirty="0" err="1"/>
+              <a:rPr lang="sk-SK" b="1" dirty="0" err="1">
+                <a:solidFill>
+                  <a:srgbClr val="FF0000"/>
+                </a:solidFill>
+                <a:highlight>
+                  <a:srgbClr val="00FFFF"/>
+                </a:highlight>
+              </a:rPr>
               <a:t>Sprint</a:t>
             </a:r>
             <a:r>
@@ -4597,15 +4738,36 @@
               </a:spcBef>
             </a:pPr>
             <a:r>
-              <a:rPr lang="sk-SK" b="1" dirty="0" err="1"/>
+              <a:rPr lang="sk-SK" b="1" dirty="0" err="1">
+                <a:solidFill>
+                  <a:srgbClr val="FF0000"/>
+                </a:solidFill>
+                <a:highlight>
+                  <a:srgbClr val="00FFFF"/>
+                </a:highlight>
+              </a:rPr>
               <a:t>Daily</a:t>
             </a:r>
             <a:r>
-              <a:rPr lang="sk-SK" b="1" dirty="0"/>
+              <a:rPr lang="sk-SK" b="1" dirty="0">
+                <a:solidFill>
+                  <a:srgbClr val="FF0000"/>
+                </a:solidFill>
+                <a:highlight>
+                  <a:srgbClr val="00FFFF"/>
+                </a:highlight>
+              </a:rPr>
               <a:t> </a:t>
             </a:r>
             <a:r>
-              <a:rPr lang="sk-SK" b="1" dirty="0" err="1"/>
+              <a:rPr lang="sk-SK" b="1" dirty="0" err="1">
+                <a:solidFill>
+                  <a:srgbClr val="FF0000"/>
+                </a:solidFill>
+                <a:highlight>
+                  <a:srgbClr val="00FFFF"/>
+                </a:highlight>
+              </a:rPr>
               <a:t>Standup</a:t>
             </a:r>
             <a:r>
@@ -4624,15 +4786,36 @@
               </a:spcBef>
             </a:pPr>
             <a:r>
-              <a:rPr lang="sk-SK" b="1" dirty="0" err="1"/>
+              <a:rPr lang="sk-SK" b="1" dirty="0" err="1">
+                <a:solidFill>
+                  <a:srgbClr val="FF0000"/>
+                </a:solidFill>
+                <a:highlight>
+                  <a:srgbClr val="00FFFF"/>
+                </a:highlight>
+              </a:rPr>
               <a:t>Product</a:t>
             </a:r>
             <a:r>
-              <a:rPr lang="sk-SK" b="1" dirty="0"/>
+              <a:rPr lang="sk-SK" b="1" dirty="0">
+                <a:solidFill>
+                  <a:srgbClr val="FF0000"/>
+                </a:solidFill>
+                <a:highlight>
+                  <a:srgbClr val="00FFFF"/>
+                </a:highlight>
+              </a:rPr>
               <a:t> </a:t>
             </a:r>
             <a:r>
-              <a:rPr lang="sk-SK" b="1" dirty="0" err="1"/>
+              <a:rPr lang="sk-SK" b="1" dirty="0" err="1">
+                <a:solidFill>
+                  <a:srgbClr val="FF0000"/>
+                </a:solidFill>
+                <a:highlight>
+                  <a:srgbClr val="00FFFF"/>
+                </a:highlight>
+              </a:rPr>
               <a:t>Owner</a:t>
             </a:r>
             <a:r>
@@ -4651,15 +4834,36 @@
               </a:spcBef>
             </a:pPr>
             <a:r>
-              <a:rPr lang="sk-SK" b="1" dirty="0" err="1"/>
+              <a:rPr lang="sk-SK" b="1" dirty="0" err="1">
+                <a:solidFill>
+                  <a:srgbClr val="FF0000"/>
+                </a:solidFill>
+                <a:highlight>
+                  <a:srgbClr val="00FFFF"/>
+                </a:highlight>
+              </a:rPr>
               <a:t>Scrum</a:t>
             </a:r>
             <a:r>
-              <a:rPr lang="sk-SK" b="1" dirty="0"/>
+              <a:rPr lang="sk-SK" b="1" dirty="0">
+                <a:solidFill>
+                  <a:srgbClr val="FF0000"/>
+                </a:solidFill>
+                <a:highlight>
+                  <a:srgbClr val="00FFFF"/>
+                </a:highlight>
+              </a:rPr>
               <a:t> </a:t>
             </a:r>
             <a:r>
-              <a:rPr lang="sk-SK" b="1" dirty="0" err="1"/>
+              <a:rPr lang="sk-SK" b="1" dirty="0" err="1">
+                <a:solidFill>
+                  <a:srgbClr val="FF0000"/>
+                </a:solidFill>
+                <a:highlight>
+                  <a:srgbClr val="00FFFF"/>
+                </a:highlight>
+              </a:rPr>
               <a:t>Master</a:t>
             </a:r>
             <a:r>
@@ -4786,7 +4990,14 @@
               <a:buNone/>
             </a:pPr>
             <a:r>
-              <a:rPr lang="sk-SK" b="1" dirty="0"/>
+              <a:rPr lang="sk-SK" b="1" dirty="0">
+                <a:solidFill>
+                  <a:srgbClr val="FF0000"/>
+                </a:solidFill>
+                <a:highlight>
+                  <a:srgbClr val="00FFFF"/>
+                </a:highlight>
+              </a:rPr>
               <a:t>História zmien</a:t>
             </a:r>
           </a:p>
@@ -4798,7 +5009,14 @@
               <a:buNone/>
             </a:pPr>
             <a:r>
-              <a:rPr lang="sk-SK" dirty="0"/>
+              <a:rPr lang="sk-SK" dirty="0">
+                <a:solidFill>
+                  <a:srgbClr val="FF0000"/>
+                </a:solidFill>
+                <a:highlight>
+                  <a:srgbClr val="00FFFF"/>
+                </a:highlight>
+              </a:rPr>
               <a:t>Celý repozitár na svojom počítači</a:t>
             </a:r>
           </a:p>
@@ -4810,11 +5028,25 @@
               <a:buNone/>
             </a:pPr>
             <a:r>
-              <a:rPr lang="sk-SK" dirty="0"/>
+              <a:rPr lang="sk-SK" dirty="0">
+                <a:solidFill>
+                  <a:srgbClr val="FF0000"/>
+                </a:solidFill>
+                <a:highlight>
+                  <a:srgbClr val="00FFFF"/>
+                </a:highlight>
+              </a:rPr>
               <a:t>Vetvenie - </a:t>
             </a:r>
             <a:r>
-              <a:rPr lang="sk-SK" b="1" dirty="0" err="1"/>
+              <a:rPr lang="sk-SK" b="1" dirty="0" err="1">
+                <a:solidFill>
+                  <a:srgbClr val="FF0000"/>
+                </a:solidFill>
+                <a:highlight>
+                  <a:srgbClr val="00FFFF"/>
+                </a:highlight>
+              </a:rPr>
               <a:t>branching</a:t>
             </a:r>
             <a:r>
@@ -4835,11 +5067,25 @@
               <a:buNone/>
             </a:pPr>
             <a:r>
-              <a:rPr lang="sk-SK" dirty="0"/>
+              <a:rPr lang="sk-SK" dirty="0">
+                <a:solidFill>
+                  <a:srgbClr val="FF0000"/>
+                </a:solidFill>
+                <a:highlight>
+                  <a:srgbClr val="00FFFF"/>
+                </a:highlight>
+              </a:rPr>
               <a:t>Zlučovanie - </a:t>
             </a:r>
             <a:r>
-              <a:rPr lang="sk-SK" b="1" dirty="0" err="1"/>
+              <a:rPr lang="sk-SK" b="1" dirty="0" err="1">
+                <a:solidFill>
+                  <a:srgbClr val="FF0000"/>
+                </a:solidFill>
+                <a:highlight>
+                  <a:srgbClr val="00FFFF"/>
+                </a:highlight>
+              </a:rPr>
               <a:t>merging</a:t>
             </a:r>
             <a:r>
@@ -4855,15 +5101,36 @@
               <a:buNone/>
             </a:pPr>
             <a:r>
-              <a:rPr lang="sk-SK" dirty="0" err="1"/>
+              <a:rPr lang="sk-SK" dirty="0" err="1">
+                <a:solidFill>
+                  <a:srgbClr val="FF0000"/>
+                </a:solidFill>
+                <a:highlight>
+                  <a:srgbClr val="00FFFF"/>
+                </a:highlight>
+              </a:rPr>
               <a:t>Tagovanie</a:t>
             </a:r>
             <a:r>
-              <a:rPr lang="sk-SK" dirty="0"/>
+              <a:rPr lang="sk-SK" dirty="0">
+                <a:solidFill>
+                  <a:srgbClr val="FF0000"/>
+                </a:solidFill>
+                <a:highlight>
+                  <a:srgbClr val="00FFFF"/>
+                </a:highlight>
+              </a:rPr>
               <a:t> - </a:t>
             </a:r>
             <a:r>
-              <a:rPr lang="sk-SK" b="1" dirty="0" err="1"/>
+              <a:rPr lang="sk-SK" b="1" dirty="0" err="1">
+                <a:solidFill>
+                  <a:srgbClr val="FF0000"/>
+                </a:solidFill>
+                <a:highlight>
+                  <a:srgbClr val="00FFFF"/>
+                </a:highlight>
+              </a:rPr>
               <a:t>tagging</a:t>
             </a:r>
             <a:r>
@@ -4879,8 +5146,19 @@
               <a:buNone/>
             </a:pPr>
             <a:r>
+              <a:rPr lang="sk-SK" dirty="0">
+                <a:solidFill>
+                  <a:srgbClr val="FF0000"/>
+                </a:solidFill>
+                <a:highlight>
+                  <a:srgbClr val="00FFFF"/>
+                </a:highlight>
+              </a:rPr>
+              <a:t>Distribuovaná spolupráca</a:t>
+            </a:r>
+            <a:r>
               <a:rPr lang="sk-SK" dirty="0"/>
-              <a:t>Distribuovaná spolupráca - zdieľanie súborov s inými</a:t>
+              <a:t> - zdieľanie súborov s inými</a:t>
             </a:r>
             <a:endParaRPr lang="sk-SK" sz="2800" dirty="0">
               <a:highlight>
@@ -4913,11 +5191,25 @@
           <a:lstStyle/>
           <a:p>
             <a:r>
-              <a:rPr lang="sk-SK" dirty="0" err="1"/>
+              <a:rPr lang="sk-SK" dirty="0" err="1">
+                <a:solidFill>
+                  <a:srgbClr val="FF0000"/>
+                </a:solidFill>
+                <a:highlight>
+                  <a:srgbClr val="00FFFF"/>
+                </a:highlight>
+              </a:rPr>
               <a:t>Verziovacie</a:t>
             </a:r>
             <a:r>
-              <a:rPr lang="sk-SK" dirty="0"/>
+              <a:rPr lang="sk-SK" dirty="0">
+                <a:solidFill>
+                  <a:srgbClr val="FF0000"/>
+                </a:solidFill>
+                <a:highlight>
+                  <a:srgbClr val="00FFFF"/>
+                </a:highlight>
+              </a:rPr>
               <a:t> systémy</a:t>
             </a:r>
           </a:p>
@@ -5002,7 +5294,14 @@
               <a:buNone/>
             </a:pPr>
             <a:r>
-              <a:rPr lang="sk-SK" b="1" dirty="0"/>
+              <a:rPr lang="sk-SK" b="1" dirty="0">
+                <a:solidFill>
+                  <a:srgbClr val="FF0000"/>
+                </a:solidFill>
+                <a:highlight>
+                  <a:srgbClr val="00FFFF"/>
+                </a:highlight>
+              </a:rPr>
               <a:t>git</a:t>
             </a:r>
             <a:r>
@@ -5036,7 +5335,14 @@
               <a:buNone/>
             </a:pPr>
             <a:r>
-              <a:rPr lang="sk-SK" b="1" dirty="0" err="1"/>
+              <a:rPr lang="sk-SK" b="1" dirty="0" err="1">
+                <a:solidFill>
+                  <a:srgbClr val="FF0000"/>
+                </a:solidFill>
+                <a:highlight>
+                  <a:srgbClr val="00FFFF"/>
+                </a:highlight>
+              </a:rPr>
               <a:t>GitHub</a:t>
             </a:r>
             <a:r>
@@ -5082,7 +5388,14 @@
               <a:buNone/>
             </a:pPr>
             <a:r>
-              <a:rPr lang="sk-SK" b="1" dirty="0" err="1"/>
+              <a:rPr lang="sk-SK" b="1" dirty="0" err="1">
+                <a:solidFill>
+                  <a:srgbClr val="FF0000"/>
+                </a:solidFill>
+                <a:highlight>
+                  <a:srgbClr val="00FFFF"/>
+                </a:highlight>
+              </a:rPr>
               <a:t>Kanban</a:t>
             </a:r>
             <a:r>
@@ -5111,16 +5424,38 @@
               <a:buNone/>
             </a:pPr>
             <a:r>
+              <a:rPr lang="sk-SK" dirty="0">
+                <a:solidFill>
+                  <a:srgbClr val="FF0000"/>
+                </a:solidFill>
+                <a:highlight>
+                  <a:srgbClr val="00FFFF"/>
+                </a:highlight>
+              </a:rPr>
+              <a:t>Dokumentácia - formát </a:t>
+            </a:r>
+            <a:r>
+              <a:rPr lang="sk-SK" b="1" dirty="0" err="1">
+                <a:solidFill>
+                  <a:srgbClr val="FF0000"/>
+                </a:solidFill>
+                <a:highlight>
+                  <a:srgbClr val="00FFFF"/>
+                </a:highlight>
+              </a:rPr>
+              <a:t>MarkDown</a:t>
+            </a:r>
+            <a:r>
+              <a:rPr lang="sk-SK" dirty="0">
+                <a:solidFill>
+                  <a:srgbClr val="FF0000"/>
+                </a:solidFill>
+              </a:rPr>
+              <a:t> </a:t>
+            </a:r>
+            <a:r>
               <a:rPr lang="sk-SK" dirty="0"/>
-              <a:t>Dokumentácia - formát </a:t>
-            </a:r>
-            <a:r>
-              <a:rPr lang="sk-SK" b="1" dirty="0" err="1"/>
-              <a:t>MarkDown</a:t>
-            </a:r>
-            <a:r>
-              <a:rPr lang="sk-SK" dirty="0"/>
-              <a:t> alebo </a:t>
+              <a:t>alebo </a:t>
             </a:r>
             <a:r>
               <a:rPr lang="sk-SK" b="1" dirty="0" err="1"/>
@@ -5174,7 +5509,14 @@
           <a:lstStyle/>
           <a:p>
             <a:r>
-              <a:rPr lang="sk-SK" dirty="0"/>
+              <a:rPr lang="sk-SK" dirty="0">
+                <a:solidFill>
+                  <a:srgbClr val="FF0000"/>
+                </a:solidFill>
+                <a:highlight>
+                  <a:srgbClr val="00FFFF"/>
+                </a:highlight>
+              </a:rPr>
               <a:t>Správa vývoja</a:t>
             </a:r>
           </a:p>
